--- a/MLOps.pptx
+++ b/MLOps.pptx
@@ -5896,27 +5896,25 @@
         </p:nvSpPr>
         <p:spPr>
           <a:xfrm>
-            <a:off x="4325112" y="100584"/>
-            <a:ext cx="3767328" cy="493776"/>
+            <a:off x="3553968" y="109728"/>
+            <a:ext cx="5084064" cy="493776"/>
           </a:xfrm>
           <a:prstGeom prst="roundRect">
             <a:avLst/>
           </a:prstGeom>
         </p:spPr>
         <p:style>
-          <a:lnRef idx="2">
-            <a:schemeClr val="accent1">
-              <a:shade val="15000"/>
-            </a:schemeClr>
+          <a:lnRef idx="1">
+            <a:schemeClr val="dk1"/>
           </a:lnRef>
-          <a:fillRef idx="1">
-            <a:schemeClr val="accent1"/>
+          <a:fillRef idx="2">
+            <a:schemeClr val="dk1"/>
           </a:fillRef>
-          <a:effectRef idx="0">
-            <a:schemeClr val="accent1"/>
+          <a:effectRef idx="1">
+            <a:schemeClr val="dk1"/>
           </a:effectRef>
           <a:fontRef idx="minor">
-            <a:schemeClr val="lt1"/>
+            <a:schemeClr val="dk1"/>
           </a:fontRef>
         </p:style>
         <p:txBody>
@@ -5926,7 +5924,232 @@
             <a:pPr algn="ctr"/>
             <a:r>
               <a:rPr lang="en-US" dirty="0"/>
-              <a:t>Micro Project: Deploy Python Package</a:t>
+              <a:t>Micro Project: Deploy Python Package (CI Concepts)</a:t>
+            </a:r>
+          </a:p>
+        </p:txBody>
+      </p:sp>
+      <p:sp>
+        <p:nvSpPr>
+          <p:cNvPr id="4" name="TextBox 3">
+            <a:extLst>
+              <a:ext uri="{FF2B5EF4-FFF2-40B4-BE49-F238E27FC236}">
+                <a16:creationId xmlns:a16="http://schemas.microsoft.com/office/drawing/2014/main" id="{A670C0AA-8C3C-838D-F7E2-9E0B57F6F1F1}"/>
+              </a:ext>
+            </a:extLst>
+          </p:cNvPr>
+          <p:cNvSpPr txBox="1"/>
+          <p:nvPr/>
+        </p:nvSpPr>
+        <p:spPr>
+          <a:xfrm>
+            <a:off x="429768" y="1380744"/>
+            <a:ext cx="11223778" cy="3416320"/>
+          </a:xfrm>
+          <a:prstGeom prst="rect">
+            <a:avLst/>
+          </a:prstGeom>
+          <a:noFill/>
+        </p:spPr>
+        <p:txBody>
+          <a:bodyPr wrap="none" rtlCol="0">
+            <a:spAutoFit/>
+          </a:bodyPr>
+          <a:lstStyle/>
+          <a:p>
+            <a:pPr marL="285750" indent="-285750">
+              <a:buFontTx/>
+              <a:buChar char="-"/>
+            </a:pPr>
+            <a:r>
+              <a:rPr lang="en-US" dirty="0"/>
+              <a:t>We will create a unified python package to perform CRUD operations which will be hosted on </a:t>
+            </a:r>
+            <a:r>
+              <a:rPr lang="en-US" dirty="0" err="1"/>
+              <a:t>github</a:t>
+            </a:r>
+            <a:r>
+              <a:rPr lang="en-US" dirty="0"/>
+              <a:t> &amp; released on</a:t>
+            </a:r>
+          </a:p>
+          <a:p>
+            <a:r>
+              <a:rPr lang="en-US" dirty="0"/>
+              <a:t>      </a:t>
+            </a:r>
+            <a:r>
+              <a:rPr lang="en-US" dirty="0" err="1"/>
+              <a:t>pypi</a:t>
+            </a:r>
+            <a:r>
+              <a:rPr lang="en-US" dirty="0"/>
+              <a:t> repo so that people can pip install and use it in their code</a:t>
+            </a:r>
+          </a:p>
+          <a:p>
+            <a:endParaRPr lang="en-US" dirty="0"/>
+          </a:p>
+          <a:p>
+            <a:pPr marL="285750" indent="-285750">
+              <a:buFontTx/>
+              <a:buChar char="-"/>
+            </a:pPr>
+            <a:r>
+              <a:rPr lang="en-US" dirty="0" err="1"/>
+              <a:t>Mongodb</a:t>
+            </a:r>
+            <a:r>
+              <a:rPr lang="en-US" dirty="0"/>
+              <a:t> is a </a:t>
+            </a:r>
+            <a:r>
+              <a:rPr lang="en-US" dirty="0" err="1"/>
+              <a:t>nosql</a:t>
+            </a:r>
+            <a:r>
+              <a:rPr lang="en-US" dirty="0"/>
+              <a:t> </a:t>
+            </a:r>
+            <a:r>
+              <a:rPr lang="en-US" dirty="0" err="1"/>
+              <a:t>dbs</a:t>
+            </a:r>
+            <a:r>
+              <a:rPr lang="en-US" dirty="0"/>
+              <a:t> where we save data in dictionary format, we will also include </a:t>
+            </a:r>
+            <a:r>
+              <a:rPr lang="en-US" dirty="0" err="1"/>
+              <a:t>cassandra</a:t>
+            </a:r>
+            <a:r>
+              <a:rPr lang="en-US" dirty="0"/>
+              <a:t>, </a:t>
+            </a:r>
+            <a:r>
+              <a:rPr lang="en-US" dirty="0" err="1"/>
+              <a:t>mysql</a:t>
+            </a:r>
+            <a:r>
+              <a:rPr lang="en-US" dirty="0"/>
+              <a:t> </a:t>
+            </a:r>
+            <a:r>
+              <a:rPr lang="en-US" dirty="0" err="1"/>
+              <a:t>etc</a:t>
+            </a:r>
+            <a:endParaRPr lang="en-US" dirty="0"/>
+          </a:p>
+          <a:p>
+            <a:pPr marL="285750" indent="-285750">
+              <a:buFontTx/>
+              <a:buChar char="-"/>
+            </a:pPr>
+            <a:endParaRPr lang="en-US" dirty="0"/>
+          </a:p>
+          <a:p>
+            <a:pPr marL="285750" indent="-285750">
+              <a:buFontTx/>
+              <a:buChar char="-"/>
+            </a:pPr>
+            <a:r>
+              <a:rPr lang="en-US" dirty="0"/>
+              <a:t>This package will be able to perform crud operations &amp; connecter for all major </a:t>
+            </a:r>
+            <a:r>
+              <a:rPr lang="en-US" dirty="0" err="1"/>
+              <a:t>dbs</a:t>
+            </a:r>
+            <a:endParaRPr lang="en-US" dirty="0"/>
+          </a:p>
+          <a:p>
+            <a:pPr marL="285750" indent="-285750">
+              <a:buFontTx/>
+              <a:buChar char="-"/>
+            </a:pPr>
+            <a:endParaRPr lang="en-US" dirty="0"/>
+          </a:p>
+          <a:p>
+            <a:pPr marL="285750" indent="-285750">
+              <a:buFontTx/>
+              <a:buChar char="-"/>
+            </a:pPr>
+            <a:r>
+              <a:rPr lang="en-US" dirty="0"/>
+              <a:t>Create folder structure using template.py</a:t>
+            </a:r>
+          </a:p>
+          <a:p>
+            <a:pPr marL="285750" indent="-285750">
+              <a:buFontTx/>
+              <a:buChar char="-"/>
+            </a:pPr>
+            <a:endParaRPr lang="en-US" dirty="0"/>
+          </a:p>
+          <a:p>
+            <a:pPr marL="285750" indent="-285750">
+              <a:buFontTx/>
+              <a:buChar char="-"/>
+            </a:pPr>
+            <a:r>
+              <a:rPr lang="en-US" dirty="0"/>
+              <a:t>Create </a:t>
+            </a:r>
+            <a:r>
+              <a:rPr lang="en-US" dirty="0" err="1"/>
+              <a:t>ci.yaml</a:t>
+            </a:r>
+            <a:r>
+              <a:rPr lang="en-US" dirty="0"/>
+              <a:t> &amp; python-</a:t>
+            </a:r>
+            <a:r>
+              <a:rPr lang="en-US"/>
+              <a:t>publish.yaml</a:t>
+            </a:r>
+            <a:endParaRPr lang="en-US" dirty="0"/>
+          </a:p>
+          <a:p>
+            <a:pPr marL="285750" indent="-285750">
+              <a:buFontTx/>
+              <a:buChar char="-"/>
+            </a:pPr>
+            <a:endParaRPr lang="en-US" dirty="0"/>
+          </a:p>
+          <a:p>
+            <a:pPr marL="285750" indent="-285750">
+              <a:buFontTx/>
+              <a:buChar char="-"/>
+            </a:pPr>
+            <a:r>
+              <a:rPr lang="en-US" dirty="0"/>
+              <a:t>Generate </a:t>
+            </a:r>
+            <a:r>
+              <a:rPr lang="en-US" dirty="0" err="1"/>
+              <a:t>pypi</a:t>
+            </a:r>
+            <a:r>
+              <a:rPr lang="en-US" dirty="0"/>
+              <a:t> </a:t>
+            </a:r>
+            <a:r>
+              <a:rPr lang="en-US" dirty="0" err="1"/>
+              <a:t>api</a:t>
+            </a:r>
+            <a:r>
+              <a:rPr lang="en-US" dirty="0"/>
+              <a:t> token &amp; add in </a:t>
+            </a:r>
+            <a:r>
+              <a:rPr lang="en-US" dirty="0" err="1"/>
+              <a:t>github</a:t>
+            </a:r>
+            <a:r>
+              <a:rPr lang="en-US" dirty="0"/>
+              <a:t> under setting &gt; security &gt; actions &gt; new repository secret</a:t>
             </a:r>
           </a:p>
         </p:txBody>
